--- a/21_September_Monday/03.1_Software_and_cluster/Juliet.pptx
+++ b/21_September_Monday/03.1_Software_and_cluster/Juliet.pptx
@@ -6317,6 +6317,122 @@
           </p:spPr>
         </p:pic>
       </p:grpSp>
+      <p:pic>
+        <p:nvPicPr>
+          <p:cNvPr id="89" name="Image" descr="Image"/>
+          <p:cNvPicPr>
+            <a:picLocks noChangeAspect="1"/>
+          </p:cNvPicPr>
+          <p:nvPr/>
+        </p:nvPicPr>
+        <p:blipFill>
+          <a:blip r:embed="rId7">
+            <a:extLst/>
+          </a:blip>
+          <a:stretch>
+            <a:fillRect/>
+          </a:stretch>
+        </p:blipFill>
+        <p:spPr>
+          <a:xfrm>
+            <a:off x="7279094" y="1026927"/>
+            <a:ext cx="1590845" cy="1590846"/>
+          </a:xfrm>
+          <a:prstGeom prst="rect">
+            <a:avLst/>
+          </a:prstGeom>
+          <a:ln w="12700">
+            <a:miter lim="400000"/>
+          </a:ln>
+        </p:spPr>
+      </p:pic>
+      <p:pic>
+        <p:nvPicPr>
+          <p:cNvPr id="90" name="pasted-movie.png" descr="pasted-movie.png"/>
+          <p:cNvPicPr>
+            <a:picLocks noChangeAspect="1"/>
+          </p:cNvPicPr>
+          <p:nvPr/>
+        </p:nvPicPr>
+        <p:blipFill>
+          <a:blip r:embed="rId8">
+            <a:extLst/>
+          </a:blip>
+          <a:stretch>
+            <a:fillRect/>
+          </a:stretch>
+        </p:blipFill>
+        <p:spPr>
+          <a:xfrm>
+            <a:off x="8200390" y="1116271"/>
+            <a:ext cx="1412159" cy="1412158"/>
+          </a:xfrm>
+          <a:prstGeom prst="rect">
+            <a:avLst/>
+          </a:prstGeom>
+          <a:ln w="12700">
+            <a:miter lim="400000"/>
+          </a:ln>
+        </p:spPr>
+      </p:pic>
+      <p:pic>
+        <p:nvPicPr>
+          <p:cNvPr id="91" name="Image" descr="Image"/>
+          <p:cNvPicPr>
+            <a:picLocks noChangeAspect="1"/>
+          </p:cNvPicPr>
+          <p:nvPr/>
+        </p:nvPicPr>
+        <p:blipFill>
+          <a:blip r:embed="rId9">
+            <a:extLst/>
+          </a:blip>
+          <a:stretch>
+            <a:fillRect/>
+          </a:stretch>
+        </p:blipFill>
+        <p:spPr>
+          <a:xfrm>
+            <a:off x="9397267" y="833465"/>
+            <a:ext cx="1977769" cy="1977770"/>
+          </a:xfrm>
+          <a:prstGeom prst="rect">
+            <a:avLst/>
+          </a:prstGeom>
+          <a:ln w="12700">
+            <a:miter lim="400000"/>
+          </a:ln>
+        </p:spPr>
+      </p:pic>
+      <p:pic>
+        <p:nvPicPr>
+          <p:cNvPr id="92" name="pasted-movie.png" descr="pasted-movie.png"/>
+          <p:cNvPicPr>
+            <a:picLocks noChangeAspect="1"/>
+          </p:cNvPicPr>
+          <p:nvPr/>
+        </p:nvPicPr>
+        <p:blipFill>
+          <a:blip r:embed="rId10">
+            <a:extLst/>
+          </a:blip>
+          <a:stretch>
+            <a:fillRect/>
+          </a:stretch>
+        </p:blipFill>
+        <p:spPr>
+          <a:xfrm>
+            <a:off x="10441414" y="1597381"/>
+            <a:ext cx="1140495" cy="1140494"/>
+          </a:xfrm>
+          <a:prstGeom prst="rect">
+            <a:avLst/>
+          </a:prstGeom>
+          <a:ln w="12700">
+            <a:miter lim="400000"/>
+          </a:ln>
+        </p:spPr>
+      </p:pic>
     </p:spTree>
   </p:cSld>
   <p:clrMapOvr>
@@ -6345,7 +6461,7 @@
       </p:grpSpPr>
       <p:pic>
         <p:nvPicPr>
-          <p:cNvPr id="90" name="Image" descr="Image"/>
+          <p:cNvPr id="94" name="Image" descr="Image"/>
           <p:cNvPicPr>
             <a:picLocks noChangeAspect="1"/>
           </p:cNvPicPr>
@@ -6374,7 +6490,7 @@
       </p:pic>
       <p:sp>
         <p:nvSpPr>
-          <p:cNvPr id="91" name="Text 1"/>
+          <p:cNvPr id="95" name="Text 1"/>
           <p:cNvSpPr txBox="1"/>
           <p:nvPr/>
         </p:nvSpPr>
@@ -6452,7 +6568,7 @@
       </p:sp>
       <p:sp>
         <p:nvSpPr>
-          <p:cNvPr id="92" name="mcrun -c --openacc PSI_DMC.instr -n0…"/>
+          <p:cNvPr id="96" name="mcrun -c --openacc PSI_DMC.instr -n0…"/>
           <p:cNvSpPr txBox="1"/>
           <p:nvPr/>
         </p:nvSpPr>
@@ -7337,7 +7453,7 @@
       </p:sp>
       <p:sp>
         <p:nvSpPr>
-          <p:cNvPr id="93" name="Arrow"/>
+          <p:cNvPr id="97" name="Arrow"/>
           <p:cNvSpPr/>
           <p:nvPr/>
         </p:nvSpPr>
@@ -7371,7 +7487,7 @@
       </p:sp>
       <p:sp>
         <p:nvSpPr>
-          <p:cNvPr id="94" name="Text 0"/>
+          <p:cNvPr id="98" name="Text 0"/>
           <p:cNvSpPr txBox="1"/>
           <p:nvPr/>
         </p:nvSpPr>
@@ -7419,7 +7535,7 @@
       </p:sp>
       <p:pic>
         <p:nvPicPr>
-          <p:cNvPr id="95" name="Image 0" descr="Image 0"/>
+          <p:cNvPr id="99" name="Image 0" descr="Image 0"/>
           <p:cNvPicPr>
             <a:picLocks noChangeAspect="1"/>
           </p:cNvPicPr>
@@ -7448,7 +7564,7 @@
       </p:pic>
       <p:sp>
         <p:nvSpPr>
-          <p:cNvPr id="96" name="Text 15"/>
+          <p:cNvPr id="100" name="Text 15"/>
           <p:cNvSpPr txBox="1"/>
           <p:nvPr/>
         </p:nvSpPr>
@@ -7496,7 +7612,7 @@
       </p:sp>
       <p:sp>
         <p:nvSpPr>
-          <p:cNvPr id="97" name="Text 16"/>
+          <p:cNvPr id="101" name="Text 16"/>
           <p:cNvSpPr txBox="1"/>
           <p:nvPr/>
         </p:nvSpPr>
@@ -7544,7 +7660,7 @@
       </p:sp>
       <p:grpSp>
         <p:nvGrpSpPr>
-          <p:cNvPr id="104" name="Group 19"/>
+          <p:cNvPr id="108" name="Group 19"/>
           <p:cNvGrpSpPr/>
           <p:nvPr/>
         </p:nvGrpSpPr>
@@ -7558,7 +7674,7 @@
         </p:grpSpPr>
         <p:grpSp>
           <p:nvGrpSpPr>
-            <p:cNvPr id="102" name="Group 20"/>
+            <p:cNvPr id="106" name="Group 20"/>
             <p:cNvGrpSpPr/>
             <p:nvPr/>
           </p:nvGrpSpPr>
@@ -7572,7 +7688,7 @@
           </p:grpSpPr>
           <p:pic>
             <p:nvPicPr>
-              <p:cNvPr id="98" name="Picture 22" descr="Picture 22"/>
+              <p:cNvPr id="102" name="Picture 22" descr="Picture 22"/>
               <p:cNvPicPr>
                 <a:picLocks noChangeAspect="1"/>
               </p:cNvPicPr>
@@ -7603,7 +7719,7 @@
           </p:pic>
           <p:grpSp>
             <p:nvGrpSpPr>
-              <p:cNvPr id="101" name="Group 32"/>
+              <p:cNvPr id="105" name="Group 32"/>
               <p:cNvGrpSpPr/>
               <p:nvPr/>
             </p:nvGrpSpPr>
@@ -7617,7 +7733,7 @@
             </p:grpSpPr>
             <p:pic>
               <p:nvPicPr>
-                <p:cNvPr id="99" name="Picture 29" descr="Picture 29"/>
+                <p:cNvPr id="103" name="Picture 29" descr="Picture 29"/>
                 <p:cNvPicPr>
                   <a:picLocks noChangeAspect="1"/>
                 </p:cNvPicPr>
@@ -7648,7 +7764,7 @@
             </p:pic>
             <p:pic>
               <p:nvPicPr>
-                <p:cNvPr id="100" name="Picture 30" descr="Picture 30"/>
+                <p:cNvPr id="104" name="Picture 30" descr="Picture 30"/>
                 <p:cNvPicPr>
                   <a:picLocks noChangeAspect="1"/>
                 </p:cNvPicPr>
@@ -7681,7 +7797,7 @@
         </p:grpSp>
         <p:pic>
           <p:nvPicPr>
-            <p:cNvPr id="103" name="Picture 31" descr="Picture 31"/>
+            <p:cNvPr id="107" name="Picture 31" descr="Picture 31"/>
             <p:cNvPicPr>
               <a:picLocks noChangeAspect="1"/>
             </p:cNvPicPr>
@@ -7713,7 +7829,7 @@
       </p:grpSp>
       <p:pic>
         <p:nvPicPr>
-          <p:cNvPr id="105" name="pasted-movie.png" descr="pasted-movie.png"/>
+          <p:cNvPr id="109" name="pasted-movie.png" descr="pasted-movie.png"/>
           <p:cNvPicPr>
             <a:picLocks noChangeAspect="1"/>
           </p:cNvPicPr>
@@ -7742,7 +7858,7 @@
       </p:pic>
       <p:pic>
         <p:nvPicPr>
-          <p:cNvPr id="106" name="pasted-movie.png" descr="pasted-movie.png"/>
+          <p:cNvPr id="110" name="pasted-movie.png" descr="pasted-movie.png"/>
           <p:cNvPicPr>
             <a:picLocks noChangeAspect="1"/>
           </p:cNvPicPr>
@@ -7797,7 +7913,7 @@
       </p:grpSpPr>
       <p:sp>
         <p:nvSpPr>
-          <p:cNvPr id="108" name="Text 1"/>
+          <p:cNvPr id="112" name="Text 1"/>
           <p:cNvSpPr txBox="1"/>
           <p:nvPr/>
         </p:nvSpPr>
@@ -7864,7 +7980,7 @@
       </p:sp>
       <p:sp>
         <p:nvSpPr>
-          <p:cNvPr id="109" name="mxrun -c --openacc SOLEIL_ROCK.instr -n0…"/>
+          <p:cNvPr id="113" name="mxrun -c --openacc SOLEIL_ROCK.instr -n0…"/>
           <p:cNvSpPr txBox="1"/>
           <p:nvPr/>
         </p:nvSpPr>
@@ -8546,7 +8662,7 @@
       </p:sp>
       <p:sp>
         <p:nvSpPr>
-          <p:cNvPr id="110" name="Arrow"/>
+          <p:cNvPr id="114" name="Arrow"/>
           <p:cNvSpPr/>
           <p:nvPr/>
         </p:nvSpPr>
@@ -8580,7 +8696,7 @@
       </p:sp>
       <p:sp>
         <p:nvSpPr>
-          <p:cNvPr id="111" name="Text 0"/>
+          <p:cNvPr id="115" name="Text 0"/>
           <p:cNvSpPr txBox="1"/>
           <p:nvPr/>
         </p:nvSpPr>
@@ -8628,7 +8744,7 @@
       </p:sp>
       <p:pic>
         <p:nvPicPr>
-          <p:cNvPr id="112" name="Image 0" descr="Image 0"/>
+          <p:cNvPr id="116" name="Image 0" descr="Image 0"/>
           <p:cNvPicPr>
             <a:picLocks noChangeAspect="1"/>
           </p:cNvPicPr>
@@ -8657,7 +8773,7 @@
       </p:pic>
       <p:sp>
         <p:nvSpPr>
-          <p:cNvPr id="113" name="Text 15"/>
+          <p:cNvPr id="117" name="Text 15"/>
           <p:cNvSpPr txBox="1"/>
           <p:nvPr/>
         </p:nvSpPr>
@@ -8705,7 +8821,7 @@
       </p:sp>
       <p:sp>
         <p:nvSpPr>
-          <p:cNvPr id="114" name="Text 16"/>
+          <p:cNvPr id="118" name="Text 16"/>
           <p:cNvSpPr txBox="1"/>
           <p:nvPr/>
         </p:nvSpPr>
@@ -8753,7 +8869,7 @@
       </p:sp>
       <p:grpSp>
         <p:nvGrpSpPr>
-          <p:cNvPr id="121" name="Group 19"/>
+          <p:cNvPr id="125" name="Group 19"/>
           <p:cNvGrpSpPr/>
           <p:nvPr/>
         </p:nvGrpSpPr>
@@ -8767,7 +8883,7 @@
         </p:grpSpPr>
         <p:grpSp>
           <p:nvGrpSpPr>
-            <p:cNvPr id="119" name="Group 20"/>
+            <p:cNvPr id="123" name="Group 20"/>
             <p:cNvGrpSpPr/>
             <p:nvPr/>
           </p:nvGrpSpPr>
@@ -8781,7 +8897,7 @@
           </p:grpSpPr>
           <p:pic>
             <p:nvPicPr>
-              <p:cNvPr id="115" name="Picture 22" descr="Picture 22"/>
+              <p:cNvPr id="119" name="Picture 22" descr="Picture 22"/>
               <p:cNvPicPr>
                 <a:picLocks noChangeAspect="1"/>
               </p:cNvPicPr>
@@ -8812,7 +8928,7 @@
           </p:pic>
           <p:grpSp>
             <p:nvGrpSpPr>
-              <p:cNvPr id="118" name="Group 32"/>
+              <p:cNvPr id="122" name="Group 32"/>
               <p:cNvGrpSpPr/>
               <p:nvPr/>
             </p:nvGrpSpPr>
@@ -8826,7 +8942,7 @@
             </p:grpSpPr>
             <p:pic>
               <p:nvPicPr>
-                <p:cNvPr id="116" name="Picture 29" descr="Picture 29"/>
+                <p:cNvPr id="120" name="Picture 29" descr="Picture 29"/>
                 <p:cNvPicPr>
                   <a:picLocks noChangeAspect="1"/>
                 </p:cNvPicPr>
@@ -8857,7 +8973,7 @@
             </p:pic>
             <p:pic>
               <p:nvPicPr>
-                <p:cNvPr id="117" name="Picture 30" descr="Picture 30"/>
+                <p:cNvPr id="121" name="Picture 30" descr="Picture 30"/>
                 <p:cNvPicPr>
                   <a:picLocks noChangeAspect="1"/>
                 </p:cNvPicPr>
@@ -8890,7 +9006,7 @@
         </p:grpSp>
         <p:pic>
           <p:nvPicPr>
-            <p:cNvPr id="120" name="Picture 31" descr="Picture 31"/>
+            <p:cNvPr id="124" name="Picture 31" descr="Picture 31"/>
             <p:cNvPicPr>
               <a:picLocks noChangeAspect="1"/>
             </p:cNvPicPr>
@@ -8922,7 +9038,7 @@
       </p:grpSp>
       <p:pic>
         <p:nvPicPr>
-          <p:cNvPr id="122" name="Image" descr="Image"/>
+          <p:cNvPr id="126" name="Image" descr="Image"/>
           <p:cNvPicPr>
             <a:picLocks noChangeAspect="1"/>
           </p:cNvPicPr>
@@ -8951,7 +9067,7 @@
       </p:pic>
       <p:pic>
         <p:nvPicPr>
-          <p:cNvPr id="123" name="pasted-movie.png" descr="pasted-movie.png"/>
+          <p:cNvPr id="127" name="pasted-movie.png" descr="pasted-movie.png"/>
           <p:cNvPicPr>
             <a:picLocks noChangeAspect="1"/>
           </p:cNvPicPr>
@@ -8980,7 +9096,7 @@
       </p:pic>
       <p:pic>
         <p:nvPicPr>
-          <p:cNvPr id="124" name="Image" descr="Image"/>
+          <p:cNvPr id="128" name="Image" descr="Image"/>
           <p:cNvPicPr>
             <a:picLocks noChangeAspect="1"/>
           </p:cNvPicPr>
@@ -9009,7 +9125,7 @@
       </p:pic>
       <p:pic>
         <p:nvPicPr>
-          <p:cNvPr id="125" name="Image" descr="Image"/>
+          <p:cNvPr id="129" name="Image" descr="Image"/>
           <p:cNvPicPr>
             <a:picLocks noChangeAspect="1"/>
           </p:cNvPicPr>
@@ -9038,7 +9154,7 @@
       </p:pic>
       <p:sp>
         <p:nvSpPr>
-          <p:cNvPr id="126" name="Arrow"/>
+          <p:cNvPr id="130" name="Arrow"/>
           <p:cNvSpPr/>
           <p:nvPr/>
         </p:nvSpPr>
